--- a/tailored/fab-ai-serving/resume.pptx
+++ b/tailored/fab-ai-serving/resume.pptx
@@ -3103,7 +3103,7 @@
       <p:grpSpPr/>
       <p:pic>
         <p:nvPicPr>
-          <p:cNvPr id="2" name="Picture 1" descr="p01.png"/>
+          <p:cNvPr id="2" name="Picture 1" descr="fab-ai-serving_p01.png"/>
           <p:cNvPicPr>
             <a:picLocks noChangeAspect="1"/>
           </p:cNvPicPr>
@@ -3153,7 +3153,7 @@
       <p:grpSpPr/>
       <p:pic>
         <p:nvPicPr>
-          <p:cNvPr id="2" name="Picture 1" descr="p02.png"/>
+          <p:cNvPr id="2" name="Picture 1" descr="fab-ai-serving_p02.png"/>
           <p:cNvPicPr>
             <a:picLocks noChangeAspect="1"/>
           </p:cNvPicPr>
@@ -3203,7 +3203,7 @@
       <p:grpSpPr/>
       <p:pic>
         <p:nvPicPr>
-          <p:cNvPr id="2" name="Picture 1" descr="p03.png"/>
+          <p:cNvPr id="2" name="Picture 1" descr="fab-ai-serving_p03.png"/>
           <p:cNvPicPr>
             <a:picLocks noChangeAspect="1"/>
           </p:cNvPicPr>
@@ -3253,7 +3253,7 @@
       <p:grpSpPr/>
       <p:pic>
         <p:nvPicPr>
-          <p:cNvPr id="2" name="Picture 1" descr="p04.png"/>
+          <p:cNvPr id="2" name="Picture 1" descr="fab-ai-serving_p04.png"/>
           <p:cNvPicPr>
             <a:picLocks noChangeAspect="1"/>
           </p:cNvPicPr>
@@ -3303,7 +3303,7 @@
       <p:grpSpPr/>
       <p:pic>
         <p:nvPicPr>
-          <p:cNvPr id="2" name="Picture 1" descr="p05.png"/>
+          <p:cNvPr id="2" name="Picture 1" descr="fab-ai-serving_p05.png"/>
           <p:cNvPicPr>
             <a:picLocks noChangeAspect="1"/>
           </p:cNvPicPr>
@@ -3353,7 +3353,7 @@
       <p:grpSpPr/>
       <p:pic>
         <p:nvPicPr>
-          <p:cNvPr id="2" name="Picture 1" descr="p06.png"/>
+          <p:cNvPr id="2" name="Picture 1" descr="fab-ai-serving_p06.png"/>
           <p:cNvPicPr>
             <a:picLocks noChangeAspect="1"/>
           </p:cNvPicPr>
